--- a/media/resources/files/Ekvivalenettuuluk_BOP_iREETTOO_KondumA_Mrsj3S1.pptx
+++ b/media/resources/files/Ekvivalenettuuluk_BOP_iREETTOO_KondumA_Mrsj3S1.pptx
@@ -33196,7 +33196,7 @@
             </a:pPr>
             <a:r>
               <a:rPr lang="ru-RU" sz="3200" dirty="0"/>
-              <a:t>Турдуу пикирлер учун ыраазычылык билдиребиз.</a:t>
+              <a:t>Түрдүү пикирлер үчүн ыраазычылык билдиребиз.</a:t>
             </a:r>
           </a:p>
           <a:p>

--- a/media/resources/files/Ekvivalenettuuluk_BOP_iREETTOO_KondumA_Mrsj3S1.pptx
+++ b/media/resources/files/Ekvivalenettuuluk_BOP_iREETTOO_KondumA_Mrsj3S1.pptx
@@ -1308,7 +1308,7 @@
           <a:p>
             <a:r>
               <a:rPr lang="ru-RU" dirty="0"/>
-              <a:t>Бөлчөктөрдү, ондуктарды жана пайыздарды иреттөө– Сабак</a:t>
+              <a:t>Бөлчөктөрдү, ондуктарды жана пайыздарды ирээттөө– Сабак</a:t>
             </a:r>
           </a:p>
           <a:p>
@@ -1317,7 +1317,7 @@
           <a:p>
             <a:r>
               <a:rPr lang="ru-RU" dirty="0"/>
-              <a:t>Бул ресурс математикалык ыкманын жандуу демонстрацияларын камсыз кылат.</a:t>
+              <a:t>Бул ресурс ыкманы жандуу көрсөтөт.</a:t>
             </a:r>
           </a:p>
           <a:p>
@@ -4619,7 +4619,7 @@
           <a:p>
             <a:r>
               <a:rPr lang="ky-KG" sz="2000" dirty="0"/>
-              <a:t>0.33</a:t>
+              <a:t>0,33</a:t>
             </a:r>
             <a:endParaRPr lang="en-GB" sz="2000" dirty="0"/>
           </a:p>
@@ -6106,7 +6106,7 @@
           <a:p>
             <a:r>
               <a:rPr lang="ky-KG" sz="2000" dirty="0"/>
-              <a:t>0.33</a:t>
+              <a:t>0,33</a:t>
             </a:r>
             <a:endParaRPr lang="en-GB" sz="2000" dirty="0"/>
           </a:p>
@@ -6586,7 +6586,7 @@
           <a:p>
             <a:r>
               <a:rPr lang="ky-KG" sz="2000" dirty="0"/>
-              <a:t>0.805</a:t>
+              <a:t>0,805</a:t>
             </a:r>
             <a:endParaRPr lang="en-GB" sz="2000" dirty="0"/>
           </a:p>
@@ -21416,7 +21416,7 @@
           <a:p>
             <a:r>
               <a:rPr lang="ky-KG" sz="2000" dirty="0"/>
-              <a:t>0.33</a:t>
+              <a:t>0,33</a:t>
             </a:r>
             <a:endParaRPr lang="en-GB" sz="2000" dirty="0"/>
           </a:p>
@@ -24066,7 +24066,7 @@
           <a:p>
             <a:r>
               <a:rPr lang="ky-KG" sz="2000" dirty="0"/>
-              <a:t>0.33</a:t>
+              <a:t>0,33</a:t>
             </a:r>
             <a:endParaRPr lang="en-GB" sz="2000" dirty="0"/>
           </a:p>
@@ -25175,7 +25175,7 @@
           <a:p>
             <a:r>
               <a:rPr lang="ky-KG" sz="2000" dirty="0"/>
-              <a:t>0.33</a:t>
+              <a:t>0,33</a:t>
             </a:r>
             <a:endParaRPr lang="en-GB" sz="2000" dirty="0"/>
           </a:p>
@@ -25655,7 +25655,7 @@
           <a:p>
             <a:r>
               <a:rPr lang="ky-KG" sz="2000" dirty="0"/>
-              <a:t>0.805</a:t>
+              <a:t>0,805</a:t>
             </a:r>
             <a:endParaRPr lang="en-GB" sz="2000" dirty="0"/>
           </a:p>
@@ -31212,7 +31212,7 @@
           <a:p>
             <a:r>
               <a:rPr lang="ky-KG" sz="2000" dirty="0"/>
-              <a:t>0.805</a:t>
+              <a:t>0,805</a:t>
             </a:r>
             <a:endParaRPr lang="en-GB" sz="2000" dirty="0"/>
           </a:p>
@@ -31887,7 +31887,7 @@
           <a:p>
             <a:r>
               <a:rPr lang="ky-KG" sz="2000" dirty="0"/>
-              <a:t>0.33</a:t>
+              <a:t>0,33</a:t>
             </a:r>
             <a:endParaRPr lang="en-GB" sz="2000" dirty="0"/>
           </a:p>
